--- a/paper-figure/examples/specimen.pptx
+++ b/paper-figure/examples/specimen.pptx
@@ -3378,6 +3378,17 @@
               <a:t>r</a:t>
             </a:r>
             <a:r>
+              <a:rPr b="0" i="1" sz="1600" baseline="30000">
+                <a:solidFill>
+                  <a:srgbClr val="212529"/>
+                </a:solidFill>
+                <a:latin typeface="Inter"/>
+                <a:ea typeface="Inter"/>
+                <a:cs typeface="Inter"/>
+              </a:rPr>
+              <a:t>p</a:t>
+            </a:r>
+            <a:r>
               <a:rPr b="0" i="0" sz="1600" baseline="30000">
                 <a:solidFill>
                   <a:srgbClr val="212529"/>
@@ -3386,7 +3397,7 @@
                 <a:ea typeface="Inter"/>
                 <a:cs typeface="Inter"/>
               </a:rPr>
-              <a:t>p−1</a:t>
+              <a:t>−1</a:t>
             </a:r>
             <a:r>
               <a:rPr b="0" i="0" sz="1600">
